--- a/Slides/Semana 9/semana_9_slides.pptx
+++ b/Slides/Semana 9/semana_9_slides.pptx
@@ -1045,7 +1045,7 @@
           <a:p>
             <a:r>
               <a:rPr lang="en-US" dirty="0"/>
-              <a:t>Notas: Amarrar a mini aula antes da demonstração. Cada item retorna na demonstração ao vivo (edge wear + dirt no asset preparado) e no estúdio (Asset 01 recebe as camadas de detalhe). Lembrar: semana de crítica 🔵 Informal — sem nota, mas o professor registra evidências de C5 para calibrar a CF4 (Semana 11).</a:t>
+              <a:t>Notas: Amarrar a mini aula antes da demonstração. Cada item retorna na demonstração ao vivo (edge wear + dirt no asset preparado) e no estúdio (Asset 01 recebe as camadas de detalhe). Lembrar: semana de crítica 🔵 Informal — sem nota, mas o professor registra evidências de C5 para calibrar a CF3 (Semana 11).</a:t>
             </a:r>
             <a:endParaRPr lang="en-US" dirty="0"/>
           </a:p>

--- a/Slides/Semana 9/semana_9_slides.pptx
+++ b/Slides/Semana 9/semana_9_slides.pptx
@@ -517,7 +517,7 @@
           <a:p>
             <a:r>
               <a:rPr lang="en-US" dirty="0"/>
-              <a:t>Notas: Abertura da mini aula (20 min). Unidade III — Pintura Digital e Bake. Crítica 🔵 Informal nesta semana. Mensagem central: na Semana 8 os estudantes aprenderam a pintar os três canais base no 3D Coat (Color, Roughness, Metallic). Hoje NÃO há ferramenta nova — há uma nova INTENÇÃO. O foco passa do estrutural (canais corretos) para o narrativo (o que aconteceu com esse objeto?). Deixar isso claro logo na capa: a pergunta que guia a semana é "qual é a história desse objeto?".</a:t>
+              <a:t>Notas: Abertura da mini aula (20 min). Unidade III — Pintura Digital e Bake. Crítica 🔵 Informal nesta semana. Mensagem central: na Semana 8 os estudantes aprenderam a pintar os três canais base no 3DCoatTextura (Color, Roughness, Metallic). Hoje NÃO há ferramenta nova — há uma nova INTENÇÃO. O foco passa do estrutural (canais corretos) para o narrativo (o que aconteceu com esse objeto?). Deixar isso claro logo na capa: a pergunta que guia a semana é "qual é a história desse objeto?".</a:t>
             </a:r>
             <a:endParaRPr lang="en-US" dirty="0"/>
           </a:p>
@@ -1137,8 +1137,8 @@
 [!FIGURA]
 Objetivo didático: antecipar o resultado esperado da demonstração para que a turma reconheça o alvo visual antes de produzir no estúdio.
 Arquivo sugerido: assets/demo_edgewear_dirt.webp
-Descrição: captura do Render Room do 3D Coat mostrando o asset de demonstração já com edge wear nas arestas superiores (cor interna + roughness mais baixo, arestas com brilho sutil diferente) e dirt acumulado nas cavidades inferiores (tom escuro e mais matte). Painel de Layers visível à lateral com as camadas EdgeWear_Color, EdgeWear_Rough, Dirt_Color e Dirt_Rough nomeadas.
-Como produzir: no 3D Coat, pintar as quatro camadas no asset de demonstração seguindo o percurso da demonstração; abrir o Render Room com iluminação HDR e capturar em um ângulo que mostre arestas e cavidades ao mesmo tempo, com o painel de Layers aberto.</a:t>
+Descrição: captura do Render Room do 3DCoatTextura mostrando o asset de demonstração já com edge wear nas arestas superiores (cor interna + roughness mais baixo, arestas com brilho sutil diferente) e dirt acumulado nas cavidades inferiores (tom escuro e mais matte). Painel de Layers visível à lateral com as camadas EdgeWear_Color, EdgeWear_Rough, Dirt_Color e Dirt_Rough nomeadas.
+Como produzir: no 3DCoatTextura, pintar as quatro camadas no asset de demonstração seguindo o percurso da demonstração; abrir o Render Room com iluminação HDR e capturar em um ângulo que mostre arestas e cavidades ao mesmo tempo, com o painel de Layers aberto.</a:t>
             </a:r>
             <a:endParaRPr lang="en-US" dirty="0"/>
           </a:p>
@@ -1319,7 +1319,7 @@
 Objetivo didático: materializar visualmente a diferença entre "textura funcional" e "textura com história" — o salto conceitual de toda a aula em uma imagem.
 Arquivo sugerido: assets/antes_depois_desgaste.webp
 Descrição: comparação lado a lado do MESMO asset (ex.: barril ou caixa de metal). À esquerda, versão S08 com Color, Roughness e Metallic base, aparência limpa e uniforme. À direita, versão S09 com edge wear nas arestas, sujeira acumulada nas cavidades inferiores e scratches direcionais.
-Como produzir: no 3D Coat, abrir o asset de demonstração; capturar o Render Room com apenas as camadas base visíveis; depois reativar as camadas de detalhe e capturar de novo no mesmo ângulo e iluminação. Compor as duas capturas lado a lado no Krita.</a:t>
+Como produzir: no 3DCoatTextura, abrir o asset de demonstração; capturar o Render Room com apenas as camadas base visíveis; depois reativar as camadas de detalhe e capturar de novo no mesmo ângulo e iluminação. Compor as duas capturas lado a lado no Krita.</a:t>
             </a:r>
             <a:endParaRPr lang="en-US" dirty="0"/>
           </a:p>
